--- a/4_Presentation/Presentation.pptx
+++ b/4_Presentation/Presentation.pptx
@@ -316,7 +316,7 @@
           <a:p>
             <a:fld id="{5BCAD085-E8A6-8845-BD4E-CB4CCA059FC4}" type="datetimeFigureOut">
               <a:rPr lang="en-US" smtClean="0"/>
-              <a:t>01/07/2025</a:t>
+              <a:t>03/07/2025</a:t>
             </a:fld>
             <a:endParaRPr lang="en-US"/>
           </a:p>
@@ -484,7 +484,7 @@
           <a:p>
             <a:fld id="{5BCAD085-E8A6-8845-BD4E-CB4CCA059FC4}" type="datetimeFigureOut">
               <a:rPr lang="en-US" smtClean="0"/>
-              <a:t>01/07/2025</a:t>
+              <a:t>03/07/2025</a:t>
             </a:fld>
             <a:endParaRPr lang="en-US"/>
           </a:p>
@@ -662,7 +662,7 @@
           <a:p>
             <a:fld id="{5BCAD085-E8A6-8845-BD4E-CB4CCA059FC4}" type="datetimeFigureOut">
               <a:rPr lang="en-US" smtClean="0"/>
-              <a:t>01/07/2025</a:t>
+              <a:t>03/07/2025</a:t>
             </a:fld>
             <a:endParaRPr lang="en-US"/>
           </a:p>
@@ -830,7 +830,7 @@
           <a:p>
             <a:fld id="{5BCAD085-E8A6-8845-BD4E-CB4CCA059FC4}" type="datetimeFigureOut">
               <a:rPr lang="en-US" smtClean="0"/>
-              <a:t>01/07/2025</a:t>
+              <a:t>03/07/2025</a:t>
             </a:fld>
             <a:endParaRPr lang="en-US"/>
           </a:p>
@@ -1075,7 +1075,7 @@
           <a:p>
             <a:fld id="{5BCAD085-E8A6-8845-BD4E-CB4CCA059FC4}" type="datetimeFigureOut">
               <a:rPr lang="en-US" smtClean="0"/>
-              <a:t>01/07/2025</a:t>
+              <a:t>03/07/2025</a:t>
             </a:fld>
             <a:endParaRPr lang="en-US"/>
           </a:p>
@@ -1360,7 +1360,7 @@
           <a:p>
             <a:fld id="{5BCAD085-E8A6-8845-BD4E-CB4CCA059FC4}" type="datetimeFigureOut">
               <a:rPr lang="en-US" smtClean="0"/>
-              <a:t>01/07/2025</a:t>
+              <a:t>03/07/2025</a:t>
             </a:fld>
             <a:endParaRPr lang="en-US"/>
           </a:p>
@@ -1779,7 +1779,7 @@
           <a:p>
             <a:fld id="{5BCAD085-E8A6-8845-BD4E-CB4CCA059FC4}" type="datetimeFigureOut">
               <a:rPr lang="en-US" smtClean="0"/>
-              <a:t>01/07/2025</a:t>
+              <a:t>03/07/2025</a:t>
             </a:fld>
             <a:endParaRPr lang="en-US"/>
           </a:p>
@@ -1896,7 +1896,7 @@
           <a:p>
             <a:fld id="{5BCAD085-E8A6-8845-BD4E-CB4CCA059FC4}" type="datetimeFigureOut">
               <a:rPr lang="en-US" smtClean="0"/>
-              <a:t>01/07/2025</a:t>
+              <a:t>03/07/2025</a:t>
             </a:fld>
             <a:endParaRPr lang="en-US"/>
           </a:p>
@@ -1991,7 +1991,7 @@
           <a:p>
             <a:fld id="{5BCAD085-E8A6-8845-BD4E-CB4CCA059FC4}" type="datetimeFigureOut">
               <a:rPr lang="en-US" smtClean="0"/>
-              <a:t>01/07/2025</a:t>
+              <a:t>03/07/2025</a:t>
             </a:fld>
             <a:endParaRPr lang="en-US"/>
           </a:p>
@@ -2266,7 +2266,7 @@
           <a:p>
             <a:fld id="{5BCAD085-E8A6-8845-BD4E-CB4CCA059FC4}" type="datetimeFigureOut">
               <a:rPr lang="en-US" smtClean="0"/>
-              <a:t>01/07/2025</a:t>
+              <a:t>03/07/2025</a:t>
             </a:fld>
             <a:endParaRPr lang="en-US"/>
           </a:p>
@@ -2518,7 +2518,7 @@
           <a:p>
             <a:fld id="{5BCAD085-E8A6-8845-BD4E-CB4CCA059FC4}" type="datetimeFigureOut">
               <a:rPr lang="en-US" smtClean="0"/>
-              <a:t>01/07/2025</a:t>
+              <a:t>03/07/2025</a:t>
             </a:fld>
             <a:endParaRPr lang="en-US"/>
           </a:p>
@@ -2729,7 +2729,7 @@
           <a:p>
             <a:fld id="{5BCAD085-E8A6-8845-BD4E-CB4CCA059FC4}" type="datetimeFigureOut">
               <a:rPr lang="en-US" smtClean="0"/>
-              <a:t>01/07/2025</a:t>
+              <a:t>03/07/2025</a:t>
             </a:fld>
             <a:endParaRPr lang="en-US"/>
           </a:p>
@@ -8928,7 +8928,7 @@
         </p:blipFill>
         <p:spPr>
           <a:xfrm>
-            <a:off x="2809198" y="3880201"/>
+            <a:off x="4724400" y="3880201"/>
             <a:ext cx="3220803" cy="2899957"/>
           </a:xfrm>
           <a:prstGeom prst="rect">
@@ -8960,6 +8960,36 @@
           <a:xfrm>
             <a:off x="1184379" y="1088991"/>
             <a:ext cx="6772956" cy="2791210"/>
+          </a:xfrm>
+          <a:prstGeom prst="rect">
+            <a:avLst/>
+          </a:prstGeom>
+        </p:spPr>
+      </p:pic>
+      <p:pic>
+        <p:nvPicPr>
+          <p:cNvPr id="2" name="Grafik 1">
+            <a:extLst>
+              <a:ext uri="{FF2B5EF4-FFF2-40B4-BE49-F238E27FC236}">
+                <a16:creationId xmlns:a16="http://schemas.microsoft.com/office/drawing/2014/main" id="{CDD5F543-26BE-4675-109F-BB19AF41E669}"/>
+              </a:ext>
+            </a:extLst>
+          </p:cNvPr>
+          <p:cNvPicPr>
+            <a:picLocks noChangeAspect="1"/>
+          </p:cNvPicPr>
+          <p:nvPr/>
+        </p:nvPicPr>
+        <p:blipFill>
+          <a:blip r:embed="rId4"/>
+          <a:stretch>
+            <a:fillRect/>
+          </a:stretch>
+        </p:blipFill>
+        <p:spPr>
+          <a:xfrm>
+            <a:off x="682199" y="4084601"/>
+            <a:ext cx="3656020" cy="2409999"/>
           </a:xfrm>
           <a:prstGeom prst="rect">
             <a:avLst/>
@@ -38636,10 +38666,10 @@
       </p:grpSp>
       <p:pic>
         <p:nvPicPr>
-          <p:cNvPr id="3" name="Grafik 2">
+          <p:cNvPr id="5" name="Grafik 4">
             <a:extLst>
               <a:ext uri="{FF2B5EF4-FFF2-40B4-BE49-F238E27FC236}">
-                <a16:creationId xmlns:a16="http://schemas.microsoft.com/office/drawing/2014/main" id="{3B1295D5-927B-A316-63AF-3CD9106551A4}"/>
+                <a16:creationId xmlns:a16="http://schemas.microsoft.com/office/drawing/2014/main" id="{7BA1D1D0-F44F-FED8-16B5-6B7FB01EF3C9}"/>
               </a:ext>
             </a:extLst>
           </p:cNvPr>
@@ -38656,37 +38686,7 @@
         </p:blipFill>
         <p:spPr>
           <a:xfrm>
-            <a:off x="2603298" y="1417721"/>
-            <a:ext cx="3935115" cy="2593975"/>
-          </a:xfrm>
-          <a:prstGeom prst="rect">
-            <a:avLst/>
-          </a:prstGeom>
-        </p:spPr>
-      </p:pic>
-      <p:pic>
-        <p:nvPicPr>
-          <p:cNvPr id="5" name="Grafik 4">
-            <a:extLst>
-              <a:ext uri="{FF2B5EF4-FFF2-40B4-BE49-F238E27FC236}">
-                <a16:creationId xmlns:a16="http://schemas.microsoft.com/office/drawing/2014/main" id="{7BA1D1D0-F44F-FED8-16B5-6B7FB01EF3C9}"/>
-              </a:ext>
-            </a:extLst>
-          </p:cNvPr>
-          <p:cNvPicPr>
-            <a:picLocks noChangeAspect="1"/>
-          </p:cNvPicPr>
-          <p:nvPr/>
-        </p:nvPicPr>
-        <p:blipFill>
-          <a:blip r:embed="rId3"/>
-          <a:stretch>
-            <a:fillRect/>
-          </a:stretch>
-        </p:blipFill>
-        <p:spPr>
-          <a:xfrm>
-            <a:off x="1869114" y="4143291"/>
+            <a:off x="1869115" y="2272838"/>
             <a:ext cx="5403484" cy="2021773"/>
           </a:xfrm>
           <a:prstGeom prst="rect">
